--- a/1학기/웹 프로그래밍/2026_웹 프로그래밍_part7_jsp.pptx
+++ b/1학기/웹 프로그래밍/2026_웹 프로그래밍_part7_jsp.pptx
@@ -1,39 +1,39 @@
 
 <file path=ppt/presentation.xml><?xml version="1.0" encoding="utf-8"?>
-<p:presentation xmlns:a="http://schemas.openxmlformats.org/drawingml/2006/main" xmlns:r="http://schemas.openxmlformats.org/officeDocument/2006/relationships" xmlns:p="http://schemas.openxmlformats.org/presentationml/2006/main" saveSubsetFonts="1">
+<p:presentation xmlns:a="http://schemas.openxmlformats.org/drawingml/2006/main" xmlns:r="http://schemas.openxmlformats.org/officeDocument/2006/relationships" xmlns:p="http://schemas.openxmlformats.org/presentationml/2006/main" xmlns:p14="http://schemas.microsoft.com/office/powerpoint/2010/main" saveSubsetFonts="1">
   <p:sldMasterIdLst>
-    <p:sldMasterId id="2147483660" r:id="rId1"/>
+    <p:sldMasterId id="2147483664" r:id="rId5"/>
   </p:sldMasterIdLst>
   <p:notesMasterIdLst>
-    <p:notesMasterId r:id="rId26"/>
+    <p:notesMasterId r:id="rId7"/>
   </p:notesMasterIdLst>
   <p:sldIdLst>
-    <p:sldId id="287" r:id="rId2"/>
-    <p:sldId id="288" r:id="rId3"/>
-    <p:sldId id="289" r:id="rId4"/>
-    <p:sldId id="290" r:id="rId5"/>
-    <p:sldId id="291" r:id="rId6"/>
-    <p:sldId id="292" r:id="rId7"/>
-    <p:sldId id="293" r:id="rId8"/>
-    <p:sldId id="294" r:id="rId9"/>
-    <p:sldId id="295" r:id="rId10"/>
-    <p:sldId id="296" r:id="rId11"/>
-    <p:sldId id="297" r:id="rId12"/>
-    <p:sldId id="298" r:id="rId13"/>
-    <p:sldId id="299" r:id="rId14"/>
-    <p:sldId id="300" r:id="rId15"/>
-    <p:sldId id="301" r:id="rId16"/>
-    <p:sldId id="302" r:id="rId17"/>
-    <p:sldId id="303" r:id="rId18"/>
-    <p:sldId id="304" r:id="rId19"/>
-    <p:sldId id="305" r:id="rId20"/>
-    <p:sldId id="306" r:id="rId21"/>
-    <p:sldId id="307" r:id="rId22"/>
-    <p:sldId id="308" r:id="rId23"/>
-    <p:sldId id="309" r:id="rId24"/>
-    <p:sldId id="310" r:id="rId25"/>
+    <p:sldId id="287" r:id="rId9"/>
+    <p:sldId id="288" r:id="rId10"/>
+    <p:sldId id="289" r:id="rId11"/>
+    <p:sldId id="290" r:id="rId12"/>
+    <p:sldId id="291" r:id="rId13"/>
+    <p:sldId id="292" r:id="rId14"/>
+    <p:sldId id="293" r:id="rId15"/>
+    <p:sldId id="294" r:id="rId16"/>
+    <p:sldId id="295" r:id="rId17"/>
+    <p:sldId id="296" r:id="rId18"/>
+    <p:sldId id="297" r:id="rId19"/>
+    <p:sldId id="298" r:id="rId20"/>
+    <p:sldId id="299" r:id="rId21"/>
+    <p:sldId id="300" r:id="rId22"/>
+    <p:sldId id="301" r:id="rId23"/>
+    <p:sldId id="302" r:id="rId24"/>
+    <p:sldId id="303" r:id="rId25"/>
+    <p:sldId id="304" r:id="rId26"/>
+    <p:sldId id="305" r:id="rId27"/>
+    <p:sldId id="306" r:id="rId28"/>
+    <p:sldId id="307" r:id="rId29"/>
+    <p:sldId id="308" r:id="rId30"/>
+    <p:sldId id="309" r:id="rId31"/>
+    <p:sldId id="310" r:id="rId32"/>
   </p:sldIdLst>
-  <p:sldSz cx="9144000" cy="6858000" type="screen4x3"/>
+  <p:sldSz cx="9144000" cy="6858000"/>
   <p:notesSz cx="6858000" cy="9144000"/>
   <p:defaultTextStyle>
     <a:defPPr>
@@ -133,12 +133,12 @@
   <p:extLst>
     <p:ext uri="{EFAFB233-063F-42B5-8137-9DF3F51BA10A}">
       <p15:sldGuideLst xmlns:p15="http://schemas.microsoft.com/office/powerpoint/2012/main">
-        <p15:guide id="1" orient="horz" pos="2160">
+        <p15:guide id="1" orient="horz" pos="2159" userDrawn="0">
           <p15:clr>
             <a:srgbClr val="A4A3A4"/>
           </p15:clr>
         </p15:guide>
-        <p15:guide id="2" pos="2880">
+        <p15:guide id="2" pos="2879" userDrawn="0">
           <p15:clr>
             <a:srgbClr val="A4A3A4"/>
           </p15:clr>
@@ -1965,7 +1965,7 @@
 </file>
 
 <file path=ppt/slides/slide1.xml><?xml version="1.0" encoding="utf-8"?>
-<p:sld xmlns:a="http://schemas.openxmlformats.org/drawingml/2006/main" xmlns:r="http://schemas.openxmlformats.org/officeDocument/2006/relationships" xmlns:p="http://schemas.openxmlformats.org/presentationml/2006/main">
+<p:sld xmlns:a="http://schemas.openxmlformats.org/drawingml/2006/main" xmlns:r="http://schemas.openxmlformats.org/officeDocument/2006/relationships" xmlns:p="http://schemas.openxmlformats.org/presentationml/2006/main" xmlns:p14="http://schemas.microsoft.com/office/powerpoint/2010/main">
   <p:cSld>
     <p:spTree>
       <p:nvGrpSpPr>
@@ -2003,7 +2003,12 @@
             <p:ph type="ctrTitle" sz="quarter"/>
           </p:nvPr>
         </p:nvSpPr>
-        <p:spPr/>
+        <p:spPr>
+          <a:xfrm>
+            <a:off x="1143000" y="1676400"/>
+            <a:ext cx="7011035" cy="1753235"/>
+          </a:xfrm>
+        </p:spPr>
         <p:txBody>
           <a:bodyPr/>
           <a:lstStyle/>
@@ -2042,7 +2047,12 @@
             <p:ph type="subTitle" sz="quarter" idx="1"/>
           </p:nvPr>
         </p:nvSpPr>
-        <p:spPr/>
+        <p:spPr>
+          <a:xfrm>
+            <a:off x="762000" y="4343400"/>
+            <a:ext cx="7696835" cy="1753235"/>
+          </a:xfrm>
+        </p:spPr>
         <p:txBody>
           <a:bodyPr/>
           <a:lstStyle/>
@@ -2058,6 +2068,82 @@
               <a:rPr lang="ko-KR" altLang="en-US" dirty="0"/>
               <a:t>조재한</a:t>
             </a:r>
+          </a:p>
+        </p:txBody>
+      </p:sp>
+      <p:sp>
+        <p:nvSpPr>
+          <p:cNvPr id="4" name="텍스트 상자 1"/>
+          <p:cNvSpPr txBox="1">
+            <a:spLocks/>
+          </p:cNvSpPr>
+          <p:nvPr/>
+        </p:nvSpPr>
+        <p:spPr>
+          <a:xfrm rot="0">
+            <a:off x="4751070" y="3614420"/>
+            <a:ext cx="3050540" cy="370205"/>
+          </a:xfrm>
+          <a:prstGeom prst="rect"/>
+          <a:noFill/>
+          <a:ln>
+            <a:noFill/>
+            <a:prstDash/>
+          </a:ln>
+        </p:spPr>
+        <p:txBody>
+          <a:bodyPr wrap="none" lIns="89535" tIns="46355" rIns="89535" bIns="46355" vert="horz" anchor="t">
+            <a:spAutoFit/>
+          </a:bodyPr>
+          <a:lstStyle/>
+          <a:p>
+            <a:pPr marL="0" indent="0" algn="l" hangingPunct="1"/>
+            <a:r>
+              <a:rPr lang="ko-KR" sz="1800">
+                <a:latin typeface="맑은 고딕" charset="0"/>
+                <a:ea typeface="맑은 고딕" charset="0"/>
+              </a:rPr>
+              <a:t>실기시험 </a:t>
+            </a:r>
+            <a:r>
+              <a:rPr lang="ko-KR" sz="1800">
+                <a:latin typeface="맑은 고딕" charset="0"/>
+                <a:ea typeface="맑은 고딕" charset="0"/>
+              </a:rPr>
+              <a:t>: js</a:t>
+            </a:r>
+            <a:r>
+              <a:rPr lang="ko-KR" sz="1800">
+                <a:latin typeface="맑은 고딕" charset="0"/>
+                <a:ea typeface="맑은 고딕" charset="0"/>
+              </a:rPr>
+              <a:t>p</a:t>
+            </a:r>
+            <a:r>
+              <a:rPr lang="ko-KR" sz="1800">
+                <a:latin typeface="맑은 고딕" charset="0"/>
+                <a:ea typeface="맑은 고딕" charset="0"/>
+              </a:rPr>
+              <a:t>계</a:t>
+            </a:r>
+            <a:r>
+              <a:rPr lang="ko-KR" sz="1800">
+                <a:latin typeface="맑은 고딕" charset="0"/>
+                <a:ea typeface="맑은 고딕" charset="0"/>
+              </a:rPr>
+              <a:t>산기 </a:t>
+            </a:r>
+            <a:r>
+              <a:rPr lang="ko-KR" sz="1800">
+                <a:latin typeface="맑은 고딕" charset="0"/>
+                <a:ea typeface="맑은 고딕" charset="0"/>
+              </a:rPr>
+              <a:t>만들기</a:t>
+            </a:r>
+            <a:endParaRPr lang="ko-KR" altLang="en-US" sz="1800">
+              <a:latin typeface="맑은 고딕" charset="0"/>
+              <a:ea typeface="맑은 고딕" charset="0"/>
+            </a:endParaRPr>
           </a:p>
         </p:txBody>
       </p:sp>
@@ -2071,6 +2157,21 @@
   <p:clrMapOvr>
     <a:masterClrMapping/>
   </p:clrMapOvr>
+  <mc:AlternateContent xmlns:mc="http://schemas.openxmlformats.org/markup-compatibility/2006">
+    <mc:Choice xmlns:p14="http://schemas.microsoft.com/office/powerpoint/2010/main" Requires="p14">
+      <p:transition spd="slow" p14:dur="2000"/>
+    </mc:Choice>
+    <mc:Fallback>
+      <p:transition spd="slow"/>
+    </mc:Fallback>
+  </mc:AlternateContent>
+  <p:timing>
+    <p:tnLst>
+      <p:par>
+        <p:cTn id="1" dur="indefinite" restart="never" nodeType="tmRoot"/>
+      </p:par>
+    </p:tnLst>
+  </p:timing>
 </p:sld>
 </file>
 
